--- a/dist/초3/영어/읽기와문화/초3_영어_읽기와문화_01_그림보고낱말읽기_학생용.pptx
+++ b/dist/초3/영어/읽기와문화/초3_영어_읽기와문화_01_그림보고낱말읽기_학생용.pptx
@@ -120,13 +120,13 @@
   <p:extLst>
     <p:ext uri="{521415D9-36F7-43E2-AB2F-B90AF26B5E84}">
       <p14:sectionLst xmlns:p14="http://schemas.microsoft.com/office/powerpoint/2010/main">
-        <p14:section name="도입" id="{21a8ea24-882a-0471-5219-2ef52a0f8bd9}">
+        <p14:section name="도입" id="{0c1bda6c-be39-3006-549e-02619c27c718}">
           <p14:sldIdLst>
             <p14:sldId id="256"/>
             <p14:sldId id="257"/>
           </p14:sldIdLst>
         </p14:section>
-        <p14:section name="개념" id="{28b132e6-848f-8fe6-0afa-3004c977a5b7}">
+        <p14:section name="개념" id="{eea2ad79-7488-83bb-e2e0-160222ea788a}">
           <p14:sldIdLst>
             <p14:sldId id="258"/>
             <p14:sldId id="259"/>
@@ -134,7 +134,7 @@
             <p14:sldId id="263"/>
           </p14:sldIdLst>
         </p14:section>
-        <p14:section name="연습" id="{9f06ba2d-625a-c0a8-e745-5bd2b7ade3f0}">
+        <p14:section name="연습" id="{989ae430-521a-d79b-a40f-6ef428269814}">
           <p14:sldIdLst>
             <p14:sldId id="260"/>
             <p14:sldId id="262"/>
@@ -142,30 +142,30 @@
             <p14:sldId id="265"/>
           </p14:sldIdLst>
         </p14:section>
-        <p14:section name="개념" id="{c34088f7-7786-1b39-86cd-7b9a3152d3ba}">
+        <p14:section name="개념" id="{689a1485-9b60-f085-de7b-7da98267fea9}">
           <p14:sldIdLst/>
         </p14:section>
-        <p14:section name="연습" id="{5faeca8b-d1bb-d233-0c6d-cf537ebb2522}">
+        <p14:section name="연습" id="{1c6ec42a-db92-41e7-2cd6-2288789d9b5e}">
           <p14:sldIdLst/>
         </p14:section>
-        <p14:section name="개념" id="{135c5832-6008-e21f-2fa5-bfccea1a5355}">
+        <p14:section name="개념" id="{def7ca18-4a9b-9a69-af16-537f1eb67d03}">
           <p14:sldIdLst/>
         </p14:section>
-        <p14:section name="연습" id="{435c443e-c676-9b8a-6f3d-dbadd27ee21b}">
+        <p14:section name="연습" id="{bf0ac236-2c8e-bc9d-1e59-dbfac5ebd8d6}">
           <p14:sldIdLst/>
         </p14:section>
-        <p14:section name="확인" id="{ca5a7ff5-4009-191b-7486-356d8ad911df}">
+        <p14:section name="확인" id="{4b96debe-3ac0-fc83-e14e-56a851df3989}">
           <p14:sldIdLst>
             <p14:sldId id="266"/>
             <p14:sldId id="267"/>
           </p14:sldIdLst>
         </p14:section>
-        <p14:section name="정리" id="{3aa22153-c49b-4764-2443-cd5685ff8917}">
+        <p14:section name="정리" id="{00f3d820-7cf5-9e01-c8fa-4846d48c6c39}">
           <p14:sldIdLst>
             <p14:sldId id="268"/>
           </p14:sldIdLst>
         </p14:section>
-        <p14:section name="보충" id="{342c694f-ff3f-f17e-617a-cd18548382e8}">
+        <p14:section name="보충" id="{430cb436-2767-f4f7-25d2-f7f7765c0777}">
           <p14:sldIdLst>
             <p14:sldId id="269"/>
           </p14:sldIdLst>

--- a/dist/초3/영어/읽기와문화/초3_영어_읽기와문화_01_그림보고낱말읽기_학생용.pptx
+++ b/dist/초3/영어/읽기와문화/초3_영어_읽기와문화_01_그림보고낱말읽기_학생용.pptx
@@ -120,13 +120,13 @@
   <p:extLst>
     <p:ext uri="{521415D9-36F7-43E2-AB2F-B90AF26B5E84}">
       <p14:sectionLst xmlns:p14="http://schemas.microsoft.com/office/powerpoint/2010/main">
-        <p14:section name="도입" id="{0c1bda6c-be39-3006-549e-02619c27c718}">
+        <p14:section name="도입" id="{027c7c55-7c25-775a-4f38-1d63ece0409d}">
           <p14:sldIdLst>
             <p14:sldId id="256"/>
             <p14:sldId id="257"/>
           </p14:sldIdLst>
         </p14:section>
-        <p14:section name="개념" id="{eea2ad79-7488-83bb-e2e0-160222ea788a}">
+        <p14:section name="개념" id="{333917ef-81eb-50f7-228e-5e6a5a624c79}">
           <p14:sldIdLst>
             <p14:sldId id="258"/>
             <p14:sldId id="259"/>
@@ -134,7 +134,7 @@
             <p14:sldId id="263"/>
           </p14:sldIdLst>
         </p14:section>
-        <p14:section name="연습" id="{989ae430-521a-d79b-a40f-6ef428269814}">
+        <p14:section name="연습" id="{2794a1e4-fff8-2e30-bd27-99966b1e3ad9}">
           <p14:sldIdLst>
             <p14:sldId id="260"/>
             <p14:sldId id="262"/>
@@ -142,30 +142,30 @@
             <p14:sldId id="265"/>
           </p14:sldIdLst>
         </p14:section>
-        <p14:section name="개념" id="{689a1485-9b60-f085-de7b-7da98267fea9}">
+        <p14:section name="개념" id="{b9c6f8db-edb0-fff3-19a4-d0e5168b3bd9}">
           <p14:sldIdLst/>
         </p14:section>
-        <p14:section name="연습" id="{1c6ec42a-db92-41e7-2cd6-2288789d9b5e}">
+        <p14:section name="연습" id="{78e0c4c9-3a50-ce24-838b-3456b1479489}">
           <p14:sldIdLst/>
         </p14:section>
-        <p14:section name="개념" id="{def7ca18-4a9b-9a69-af16-537f1eb67d03}">
+        <p14:section name="개념" id="{90bf2f70-fccf-f3ad-6d19-45d563284339}">
           <p14:sldIdLst/>
         </p14:section>
-        <p14:section name="연습" id="{bf0ac236-2c8e-bc9d-1e59-dbfac5ebd8d6}">
+        <p14:section name="연습" id="{e67c72a0-6060-1e80-abf5-ca15e4c73d6b}">
           <p14:sldIdLst/>
         </p14:section>
-        <p14:section name="확인" id="{4b96debe-3ac0-fc83-e14e-56a851df3989}">
+        <p14:section name="확인" id="{4d9d3b0d-7a6f-a990-7b4c-1b3bc24773be}">
           <p14:sldIdLst>
             <p14:sldId id="266"/>
             <p14:sldId id="267"/>
           </p14:sldIdLst>
         </p14:section>
-        <p14:section name="정리" id="{00f3d820-7cf5-9e01-c8fa-4846d48c6c39}">
+        <p14:section name="정리" id="{490ba945-9add-0a21-9fcb-ed1fa5f2b077}">
           <p14:sldIdLst>
             <p14:sldId id="268"/>
           </p14:sldIdLst>
         </p14:section>
-        <p14:section name="보충" id="{430cb436-2767-f4f7-25d2-f7f7765c0777}">
+        <p14:section name="보충" id="{dda016ce-5295-d2f8-5cad-af458ee760f2}">
           <p14:sldIdLst>
             <p14:sldId id="269"/>
           </p14:sldIdLst>

--- a/dist/초3/영어/읽기와문화/초3_영어_읽기와문화_01_그림보고낱말읽기_학생용.pptx
+++ b/dist/초3/영어/읽기와문화/초3_영어_읽기와문화_01_그림보고낱말읽기_학생용.pptx
@@ -120,13 +120,13 @@
   <p:extLst>
     <p:ext uri="{521415D9-36F7-43E2-AB2F-B90AF26B5E84}">
       <p14:sectionLst xmlns:p14="http://schemas.microsoft.com/office/powerpoint/2010/main">
-        <p14:section name="도입" id="{027c7c55-7c25-775a-4f38-1d63ece0409d}">
+        <p14:section name="도입" id="{50fe46b6-63fa-3848-9565-f5a0488ebd01}">
           <p14:sldIdLst>
             <p14:sldId id="256"/>
             <p14:sldId id="257"/>
           </p14:sldIdLst>
         </p14:section>
-        <p14:section name="개념" id="{333917ef-81eb-50f7-228e-5e6a5a624c79}">
+        <p14:section name="개념" id="{96669a2f-9adf-2d8f-2660-34630f4e9ef1}">
           <p14:sldIdLst>
             <p14:sldId id="258"/>
             <p14:sldId id="259"/>
@@ -134,7 +134,7 @@
             <p14:sldId id="263"/>
           </p14:sldIdLst>
         </p14:section>
-        <p14:section name="연습" id="{2794a1e4-fff8-2e30-bd27-99966b1e3ad9}">
+        <p14:section name="연습" id="{e35bfc04-1bfb-abba-3d8b-c11d8df0d34c}">
           <p14:sldIdLst>
             <p14:sldId id="260"/>
             <p14:sldId id="262"/>
@@ -142,30 +142,30 @@
             <p14:sldId id="265"/>
           </p14:sldIdLst>
         </p14:section>
-        <p14:section name="개념" id="{b9c6f8db-edb0-fff3-19a4-d0e5168b3bd9}">
+        <p14:section name="개념" id="{28277126-0135-8ec8-b3b3-0e81c65f9496}">
           <p14:sldIdLst/>
         </p14:section>
-        <p14:section name="연습" id="{78e0c4c9-3a50-ce24-838b-3456b1479489}">
+        <p14:section name="연습" id="{826dcb06-77d0-0078-03d3-b11b8dc815c7}">
           <p14:sldIdLst/>
         </p14:section>
-        <p14:section name="개념" id="{90bf2f70-fccf-f3ad-6d19-45d563284339}">
+        <p14:section name="개념" id="{07106270-a118-6e53-91b7-e76b5275d530}">
           <p14:sldIdLst/>
         </p14:section>
-        <p14:section name="연습" id="{e67c72a0-6060-1e80-abf5-ca15e4c73d6b}">
+        <p14:section name="연습" id="{7bc353d7-9a31-ec03-20ce-af40ba47416c}">
           <p14:sldIdLst/>
         </p14:section>
-        <p14:section name="확인" id="{4d9d3b0d-7a6f-a990-7b4c-1b3bc24773be}">
+        <p14:section name="확인" id="{8828abf1-1ace-4c12-1d2e-bdf99382c288}">
           <p14:sldIdLst>
             <p14:sldId id="266"/>
             <p14:sldId id="267"/>
           </p14:sldIdLst>
         </p14:section>
-        <p14:section name="정리" id="{490ba945-9add-0a21-9fcb-ed1fa5f2b077}">
+        <p14:section name="정리" id="{140b4d6b-7303-ef0e-6eeb-aa53493d5530}">
           <p14:sldIdLst>
             <p14:sldId id="268"/>
           </p14:sldIdLst>
         </p14:section>
-        <p14:section name="보충" id="{dda016ce-5295-d2f8-5cad-af458ee760f2}">
+        <p14:section name="보충" id="{0540fa8e-532e-779f-06c9-879ca011be86}">
           <p14:sldIdLst>
             <p14:sldId id="269"/>
           </p14:sldIdLst>
